--- a/decks/geog-local-place/geog-local-place_ch6_world.pptx
+++ b/decks/geog-local-place/geog-local-place_ch6_world.pptx
@@ -127,30 +127,30 @@
   <p:extLst>
     <p:ext uri="{521415D9-36F7-43E2-AB2F-B90AF26B5E84}">
       <p14:sectionLst xmlns:p14="http://schemas.microsoft.com/office/powerpoint/2010/main">
-        <p14:section name="Opening" id="{a14739f1-24fc-8886-4f8e-8d111d3005ed}">
+        <p14:section name="Opening" id="{82242fe0-a2f0-0205-eb42-98a47b99d60b}">
           <p14:sldIdLst>
             <p14:sldId id="256"/>
           </p14:sldIdLst>
         </p14:section>
-        <p14:section name="Gate" id="{fb1b2adc-664e-2320-84ea-06ad04469790}">
+        <p14:section name="Gate" id="{f9658d9c-7bda-44a3-82d7-ec4c9475537f}">
           <p14:sldIdLst>
             <p14:sldId id="257"/>
             <p14:sldId id="258"/>
           </p14:sldIdLst>
         </p14:section>
-        <p14:section name="Pre-teach" id="{3fbfcf41-170f-825c-5424-a668a96688c0}">
+        <p14:section name="Pre-teach" id="{574302dc-e8f8-078c-a31a-a8cd1f9aec48}">
           <p14:sldIdLst>
             <p14:sldId id="259"/>
             <p14:sldId id="260"/>
           </p14:sldIdLst>
         </p14:section>
-        <p14:section name="Read-along" id="{7962d886-2081-f225-18ce-7db211c79150}">
+        <p14:section name="Read-along" id="{27598f62-4251-5683-9d80-7a7a23f62634}">
           <p14:sldIdLst>
             <p14:sldId id="261"/>
             <p14:sldId id="262"/>
           </p14:sldIdLst>
         </p14:section>
-        <p14:section name="Teach" id="{d080989f-9808-eb94-c73b-9d4fa08ee9c1}">
+        <p14:section name="Teach" id="{bdcc5c3f-47b8-3ada-fea5-75ac8829cf78}">
           <p14:sldIdLst>
             <p14:sldId id="263"/>
             <p14:sldId id="264"/>
@@ -159,7 +159,7 @@
             <p14:sldId id="267"/>
           </p14:sldIdLst>
         </p14:section>
-        <p14:section name="Routes" id="{8ed16886-cf2a-d8b5-d713-dc1bc22cb58a}">
+        <p14:section name="Routes" id="{23cfc2ef-8d78-fe48-91aa-23201c7854e9}">
           <p14:sldIdLst>
             <p14:sldId id="268"/>
             <p14:sldId id="269"/>
@@ -168,12 +168,12 @@
             <p14:sldId id="272"/>
           </p14:sldIdLst>
         </p14:section>
-        <p14:section name="Close" id="{c2c96e7f-436b-8a94-ff18-cb4141990bc5}">
+        <p14:section name="Close" id="{b844e1b8-139b-53ef-66a2-92990a8c1546}">
           <p14:sldIdLst>
             <p14:sldId id="273"/>
           </p14:sldIdLst>
         </p14:section>
-        <p14:section name="Answers" id="{7467c1e7-8477-4fae-7e72-1b15b7d1a11a}">
+        <p14:section name="Answers" id="{03338dff-4d20-3fef-5fc7-824122663894}">
           <p14:sldIdLst>
             <p14:sldId id="274"/>
             <p14:sldId id="275"/>
